--- a/Daikoku_poster_revised.pptx
+++ b/Daikoku_poster_revised.pptx
@@ -120,18 +120,18 @@
   <pc:docChgLst>
     <pc:chgData name="Morita, Kyosuke (Chief Data &amp; AI Office)" userId="119e9f40-878d-4f87-860c-46ce3038b690" providerId="ADAL" clId="{07C827D1-702F-594D-B946-51D457815CCC}"/>
     <pc:docChg chg="undo custSel modSld">
-      <pc:chgData name="Morita, Kyosuke (Chief Data &amp; AI Office)" userId="119e9f40-878d-4f87-860c-46ce3038b690" providerId="ADAL" clId="{07C827D1-702F-594D-B946-51D457815CCC}" dt="2026-10-13T21:27:52.828" v="118" actId="1076"/>
+      <pc:chgData name="Morita, Kyosuke (Chief Data &amp; AI Office)" userId="119e9f40-878d-4f87-860c-46ce3038b690" providerId="ADAL" clId="{07C827D1-702F-594D-B946-51D457815CCC}" dt="2026-10-19T09:28:14.662" v="127" actId="1076"/>
       <pc:docMkLst>
         <pc:docMk/>
       </pc:docMkLst>
       <pc:sldChg chg="addSp delSp modSp mod">
-        <pc:chgData name="Morita, Kyosuke (Chief Data &amp; AI Office)" userId="119e9f40-878d-4f87-860c-46ce3038b690" providerId="ADAL" clId="{07C827D1-702F-594D-B946-51D457815CCC}" dt="2026-10-13T21:27:52.828" v="118" actId="1076"/>
+        <pc:chgData name="Morita, Kyosuke (Chief Data &amp; AI Office)" userId="119e9f40-878d-4f87-860c-46ce3038b690" providerId="ADAL" clId="{07C827D1-702F-594D-B946-51D457815CCC}" dt="2026-10-19T09:28:14.662" v="127" actId="1076"/>
         <pc:sldMkLst>
           <pc:docMk/>
           <pc:sldMk cId="1187388567" sldId="257"/>
         </pc:sldMkLst>
         <pc:spChg chg="mod">
-          <ac:chgData name="Morita, Kyosuke (Chief Data &amp; AI Office)" userId="119e9f40-878d-4f87-860c-46ce3038b690" providerId="ADAL" clId="{07C827D1-702F-594D-B946-51D457815CCC}" dt="2026-10-13T21:11:02.540" v="113" actId="1076"/>
+          <ac:chgData name="Morita, Kyosuke (Chief Data &amp; AI Office)" userId="119e9f40-878d-4f87-860c-46ce3038b690" providerId="ADAL" clId="{07C827D1-702F-594D-B946-51D457815CCC}" dt="2026-10-19T09:28:14.662" v="127" actId="1076"/>
           <ac:spMkLst>
             <pc:docMk/>
             <pc:sldMk cId="1187388567" sldId="257"/>
@@ -178,28 +178,12 @@
             <ac:spMk id="15" creationId="{00000000-0000-0000-0000-000000000000}"/>
           </ac:spMkLst>
         </pc:spChg>
-        <pc:spChg chg="del mod">
-          <ac:chgData name="Morita, Kyosuke (Chief Data &amp; AI Office)" userId="119e9f40-878d-4f87-860c-46ce3038b690" providerId="ADAL" clId="{07C827D1-702F-594D-B946-51D457815CCC}" dt="2026-10-13T21:08:44.102" v="96" actId="478"/>
-          <ac:spMkLst>
-            <pc:docMk/>
-            <pc:sldMk cId="1187388567" sldId="257"/>
-            <ac:spMk id="20" creationId="{00000000-0000-0000-0000-000000000000}"/>
-          </ac:spMkLst>
-        </pc:spChg>
         <pc:spChg chg="mod">
           <ac:chgData name="Morita, Kyosuke (Chief Data &amp; AI Office)" userId="119e9f40-878d-4f87-860c-46ce3038b690" providerId="ADAL" clId="{07C827D1-702F-594D-B946-51D457815CCC}" dt="2026-10-13T21:07:59.522" v="86" actId="1076"/>
           <ac:spMkLst>
             <pc:docMk/>
             <pc:sldMk cId="1187388567" sldId="257"/>
             <ac:spMk id="21" creationId="{00000000-0000-0000-0000-000000000000}"/>
-          </ac:spMkLst>
-        </pc:spChg>
-        <pc:spChg chg="del mod">
-          <ac:chgData name="Morita, Kyosuke (Chief Data &amp; AI Office)" userId="119e9f40-878d-4f87-860c-46ce3038b690" providerId="ADAL" clId="{07C827D1-702F-594D-B946-51D457815CCC}" dt="2026-10-13T21:08:46.628" v="97" actId="478"/>
-          <ac:spMkLst>
-            <pc:docMk/>
-            <pc:sldMk cId="1187388567" sldId="257"/>
-            <ac:spMk id="22" creationId="{00000000-0000-0000-0000-000000000000}"/>
           </ac:spMkLst>
         </pc:spChg>
         <pc:spChg chg="mod">
@@ -226,8 +210,8 @@
             <ac:picMk id="3" creationId="{B565DF27-B061-C6E8-453F-5EF030E2ECA0}"/>
           </ac:picMkLst>
         </pc:picChg>
-        <pc:picChg chg="mod">
-          <ac:chgData name="Morita, Kyosuke (Chief Data &amp; AI Office)" userId="119e9f40-878d-4f87-860c-46ce3038b690" providerId="ADAL" clId="{07C827D1-702F-594D-B946-51D457815CCC}" dt="2026-10-13T21:10:39.637" v="111" actId="1076"/>
+        <pc:picChg chg="del mod">
+          <ac:chgData name="Morita, Kyosuke (Chief Data &amp; AI Office)" userId="119e9f40-878d-4f87-860c-46ce3038b690" providerId="ADAL" clId="{07C827D1-702F-594D-B946-51D457815CCC}" dt="2026-10-19T09:27:04.979" v="119" actId="478"/>
           <ac:picMkLst>
             <pc:docMk/>
             <pc:sldMk cId="1187388567" sldId="257"/>
@@ -242,20 +226,12 @@
             <ac:picMk id="19" creationId="{19FF6691-D727-A6E5-B426-1686244BB269}"/>
           </ac:picMkLst>
         </pc:picChg>
-        <pc:picChg chg="del">
-          <ac:chgData name="Morita, Kyosuke (Chief Data &amp; AI Office)" userId="119e9f40-878d-4f87-860c-46ce3038b690" providerId="ADAL" clId="{07C827D1-702F-594D-B946-51D457815CCC}" dt="2026-10-13T21:04:33.926" v="47" actId="478"/>
+        <pc:picChg chg="add mod">
+          <ac:chgData name="Morita, Kyosuke (Chief Data &amp; AI Office)" userId="119e9f40-878d-4f87-860c-46ce3038b690" providerId="ADAL" clId="{07C827D1-702F-594D-B946-51D457815CCC}" dt="2026-10-19T09:27:37.120" v="126" actId="1076"/>
           <ac:picMkLst>
             <pc:docMk/>
             <pc:sldMk cId="1187388567" sldId="257"/>
-            <ac:picMk id="170" creationId="{FEAEF5AC-D272-31EA-27D8-462F737175A5}"/>
-          </ac:picMkLst>
-        </pc:picChg>
-        <pc:picChg chg="del">
-          <ac:chgData name="Morita, Kyosuke (Chief Data &amp; AI Office)" userId="119e9f40-878d-4f87-860c-46ce3038b690" providerId="ADAL" clId="{07C827D1-702F-594D-B946-51D457815CCC}" dt="2026-10-13T21:04:32.656" v="46" actId="478"/>
-          <ac:picMkLst>
-            <pc:docMk/>
-            <pc:sldMk cId="1187388567" sldId="257"/>
-            <ac:picMk id="172" creationId="{32C22A82-9793-2AF2-9F37-81DE032308E4}"/>
+            <ac:picMk id="20" creationId="{F2C67E40-9F0E-F01A-00C7-36C9DB95C947}"/>
           </ac:picMkLst>
         </pc:picChg>
         <pc:picChg chg="add mod">
@@ -940,7 +916,7 @@
           <a:p>
             <a:fld id="{11BC18F9-AF19-1249-B878-15A5F238A3F5}" type="datetimeFigureOut">
               <a:rPr lang="en-US" smtClean="0"/>
-              <a:t>10/13/26</a:t>
+              <a:t>10/19/26</a:t>
             </a:fld>
             <a:endParaRPr lang="en-US"/>
           </a:p>
@@ -1110,7 +1086,7 @@
           <a:p>
             <a:fld id="{11BC18F9-AF19-1249-B878-15A5F238A3F5}" type="datetimeFigureOut">
               <a:rPr lang="en-US" smtClean="0"/>
-              <a:t>10/13/26</a:t>
+              <a:t>10/19/26</a:t>
             </a:fld>
             <a:endParaRPr lang="en-US"/>
           </a:p>
@@ -1290,7 +1266,7 @@
           <a:p>
             <a:fld id="{11BC18F9-AF19-1249-B878-15A5F238A3F5}" type="datetimeFigureOut">
               <a:rPr lang="en-US" smtClean="0"/>
-              <a:t>10/13/26</a:t>
+              <a:t>10/19/26</a:t>
             </a:fld>
             <a:endParaRPr lang="en-US"/>
           </a:p>
@@ -1460,7 +1436,7 @@
           <a:p>
             <a:fld id="{11BC18F9-AF19-1249-B878-15A5F238A3F5}" type="datetimeFigureOut">
               <a:rPr lang="en-US" smtClean="0"/>
-              <a:t>10/13/26</a:t>
+              <a:t>10/19/26</a:t>
             </a:fld>
             <a:endParaRPr lang="en-US"/>
           </a:p>
@@ -1706,7 +1682,7 @@
           <a:p>
             <a:fld id="{11BC18F9-AF19-1249-B878-15A5F238A3F5}" type="datetimeFigureOut">
               <a:rPr lang="en-US" smtClean="0"/>
-              <a:t>10/13/26</a:t>
+              <a:t>10/19/26</a:t>
             </a:fld>
             <a:endParaRPr lang="en-US"/>
           </a:p>
@@ -1938,7 +1914,7 @@
           <a:p>
             <a:fld id="{11BC18F9-AF19-1249-B878-15A5F238A3F5}" type="datetimeFigureOut">
               <a:rPr lang="en-US" smtClean="0"/>
-              <a:t>10/13/26</a:t>
+              <a:t>10/19/26</a:t>
             </a:fld>
             <a:endParaRPr lang="en-US"/>
           </a:p>
@@ -2305,7 +2281,7 @@
           <a:p>
             <a:fld id="{11BC18F9-AF19-1249-B878-15A5F238A3F5}" type="datetimeFigureOut">
               <a:rPr lang="en-US" smtClean="0"/>
-              <a:t>10/13/26</a:t>
+              <a:t>10/19/26</a:t>
             </a:fld>
             <a:endParaRPr lang="en-US"/>
           </a:p>
@@ -2423,7 +2399,7 @@
           <a:p>
             <a:fld id="{11BC18F9-AF19-1249-B878-15A5F238A3F5}" type="datetimeFigureOut">
               <a:rPr lang="en-US" smtClean="0"/>
-              <a:t>10/13/26</a:t>
+              <a:t>10/19/26</a:t>
             </a:fld>
             <a:endParaRPr lang="en-US"/>
           </a:p>
@@ -2518,7 +2494,7 @@
           <a:p>
             <a:fld id="{11BC18F9-AF19-1249-B878-15A5F238A3F5}" type="datetimeFigureOut">
               <a:rPr lang="en-US" smtClean="0"/>
-              <a:t>10/13/26</a:t>
+              <a:t>10/19/26</a:t>
             </a:fld>
             <a:endParaRPr lang="en-US"/>
           </a:p>
@@ -2795,7 +2771,7 @@
           <a:p>
             <a:fld id="{11BC18F9-AF19-1249-B878-15A5F238A3F5}" type="datetimeFigureOut">
               <a:rPr lang="en-US" smtClean="0"/>
-              <a:t>10/13/26</a:t>
+              <a:t>10/19/26</a:t>
             </a:fld>
             <a:endParaRPr lang="en-US"/>
           </a:p>
@@ -3052,7 +3028,7 @@
           <a:p>
             <a:fld id="{11BC18F9-AF19-1249-B878-15A5F238A3F5}" type="datetimeFigureOut">
               <a:rPr lang="en-US" smtClean="0"/>
-              <a:t>10/13/26</a:t>
+              <a:t>10/19/26</a:t>
             </a:fld>
             <a:endParaRPr lang="en-US"/>
           </a:p>
@@ -3265,7 +3241,7 @@
           <a:p>
             <a:fld id="{11BC18F9-AF19-1249-B878-15A5F238A3F5}" type="datetimeFigureOut">
               <a:rPr lang="en-US" smtClean="0"/>
-              <a:t>10/13/26</a:t>
+              <a:t>10/19/26</a:t>
             </a:fld>
             <a:endParaRPr lang="en-US"/>
           </a:p>
@@ -4224,7 +4200,7 @@
         </p:nvSpPr>
         <p:spPr>
           <a:xfrm>
-            <a:off x="4572000" y="-99656"/>
+            <a:off x="4595774" y="-122250"/>
             <a:ext cx="23591520" cy="2606040"/>
           </a:xfrm>
           <a:prstGeom prst="rect">
@@ -4427,36 +4403,6 @@
           </a:p>
         </p:txBody>
       </p:sp>
-      <p:pic>
-        <p:nvPicPr>
-          <p:cNvPr id="5" name="Picture 4">
-            <a:extLst>
-              <a:ext uri="{FF2B5EF4-FFF2-40B4-BE49-F238E27FC236}">
-                <a16:creationId xmlns:a16="http://schemas.microsoft.com/office/drawing/2014/main" id="{C7F98715-987C-449A-F609-9A000D507914}"/>
-              </a:ext>
-            </a:extLst>
-          </p:cNvPr>
-          <p:cNvPicPr>
-            <a:picLocks noChangeAspect="1"/>
-          </p:cNvPicPr>
-          <p:nvPr/>
-        </p:nvPicPr>
-        <p:blipFill>
-          <a:blip r:embed="rId4"/>
-          <a:stretch>
-            <a:fillRect/>
-          </a:stretch>
-        </p:blipFill>
-        <p:spPr>
-          <a:xfrm>
-            <a:off x="26591564" y="679368"/>
-            <a:ext cx="5369477" cy="1037877"/>
-          </a:xfrm>
-          <a:prstGeom prst="rect">
-            <a:avLst/>
-          </a:prstGeom>
-        </p:spPr>
-      </p:pic>
       <p:sp>
         <p:nvSpPr>
           <p:cNvPr id="7" name="TextBox 6"/>
@@ -8739,7 +8685,7 @@
         </p:xfrm>
         <a:graphic>
           <a:graphicData uri="http://schemas.openxmlformats.org/drawingml/2006/chart">
-            <c:chart xmlns:c="http://schemas.openxmlformats.org/drawingml/2006/chart" xmlns:r="http://schemas.openxmlformats.org/officeDocument/2006/relationships" r:id="rId5"/>
+            <c:chart xmlns:c="http://schemas.openxmlformats.org/drawingml/2006/chart" xmlns:r="http://schemas.openxmlformats.org/officeDocument/2006/relationships" r:id="rId4"/>
           </a:graphicData>
         </a:graphic>
       </p:graphicFrame>
@@ -14206,7 +14152,7 @@
           <p:nvPr/>
         </p:nvPicPr>
         <p:blipFill>
-          <a:blip r:embed="rId6"/>
+          <a:blip r:embed="rId5"/>
           <a:stretch>
             <a:fillRect/>
           </a:stretch>
@@ -14236,6 +14182,36 @@
           <p:nvPr/>
         </p:nvPicPr>
         <p:blipFill>
+          <a:blip r:embed="rId6"/>
+          <a:stretch>
+            <a:fillRect/>
+          </a:stretch>
+        </p:blipFill>
+        <p:spPr>
+          <a:xfrm>
+            <a:off x="28334283" y="40073373"/>
+            <a:ext cx="1847275" cy="1847275"/>
+          </a:xfrm>
+          <a:prstGeom prst="rect">
+            <a:avLst/>
+          </a:prstGeom>
+        </p:spPr>
+      </p:pic>
+      <p:pic>
+        <p:nvPicPr>
+          <p:cNvPr id="20" name="Picture 19">
+            <a:extLst>
+              <a:ext uri="{FF2B5EF4-FFF2-40B4-BE49-F238E27FC236}">
+                <a16:creationId xmlns:a16="http://schemas.microsoft.com/office/drawing/2014/main" id="{F2C67E40-9F0E-F01A-00C7-36C9DB95C947}"/>
+              </a:ext>
+            </a:extLst>
+          </p:cNvPr>
+          <p:cNvPicPr>
+            <a:picLocks noChangeAspect="1"/>
+          </p:cNvPicPr>
+          <p:nvPr/>
+        </p:nvPicPr>
+        <p:blipFill>
           <a:blip r:embed="rId7"/>
           <a:stretch>
             <a:fillRect/>
@@ -14243,8 +14219,8 @@
         </p:blipFill>
         <p:spPr>
           <a:xfrm>
-            <a:off x="28334283" y="40073373"/>
-            <a:ext cx="1847275" cy="1847275"/>
+            <a:off x="22174200" y="2825495"/>
+            <a:ext cx="10127894" cy="1044438"/>
           </a:xfrm>
           <a:prstGeom prst="rect">
             <a:avLst/>
